--- a/media/resources/files/Onduktar_KoboytuuBoluuSandykBashKatyrma.pptx
+++ b/media/resources/files/Onduktar_KoboytuuBoluuSandykBashKatyrma.pptx
@@ -34302,7 +34302,7 @@
                 <a:ea typeface="+mn-ea"/>
                 <a:cs typeface="+mn-cs"/>
               </a:rPr>
-              <a:t>Турдуу пикирлер учун ыраазычылык билдиребиз.</a:t>
+              <a:t>Түрдүү пикирлер үчүн ыраазычылык билдиребиз.</a:t>
             </a:r>
           </a:p>
           <a:p>

--- a/media/resources/files/Onduktar_KoboytuuBoluuSandykBashKatyrma.pptx
+++ b/media/resources/files/Onduktar_KoboytuuBoluuSandykBashKatyrma.pptx
@@ -2546,7 +2546,7 @@
           <a:p>
             <a:r>
               <a:rPr lang="en-GB" sz="2400" dirty="0"/>
-              <a:t>3.4 ÷ 0.2 = 17</a:t>
+              <a:t>3,4 ÷ 0,2 = 17</a:t>
             </a:r>
           </a:p>
         </p:txBody>
@@ -3175,7 +3175,7 @@
           <a:p>
             <a:r>
               <a:rPr lang="en-GB" sz="2400" dirty="0"/>
-              <a:t>8.1 ÷ 0.3 = 27</a:t>
+              <a:t>8,1 ÷ 0,3 = 27</a:t>
             </a:r>
           </a:p>
         </p:txBody>
@@ -3210,7 +3210,7 @@
           <a:p>
             <a:r>
               <a:rPr lang="en-GB" sz="2400" dirty="0"/>
-              <a:t>1.4 ÷ 0.7 = 02</a:t>
+              <a:t>1,4 ÷ 0,7 = 02</a:t>
             </a:r>
           </a:p>
         </p:txBody>
@@ -3245,7 +3245,7 @@
           <a:p>
             <a:r>
               <a:rPr lang="en-GB" sz="2400" dirty="0"/>
-              <a:t>9.6 ÷ 0.8 = 12</a:t>
+              <a:t>9,6 ÷ 0,8 = 12</a:t>
             </a:r>
           </a:p>
         </p:txBody>
@@ -4046,7 +4046,7 @@
             <a:pPr algn="ctr"/>
             <a:r>
               <a:rPr lang="en-GB" sz="2400" dirty="0"/>
-              <a:t>3.6 ÷ 0.4 = 9</a:t>
+              <a:t>3,6 ÷ 0,4 = 9</a:t>
             </a:r>
           </a:p>
         </p:txBody>
@@ -4082,7 +4082,7 @@
             <a:pPr algn="ctr"/>
             <a:r>
               <a:rPr lang="en-GB" sz="2400" dirty="0"/>
-              <a:t>6.0 ÷ 1.2 = 5</a:t>
+              <a:t>6,0 ÷ 1,2 = 5</a:t>
             </a:r>
           </a:p>
         </p:txBody>
@@ -4118,7 +4118,7 @@
             <a:pPr algn="ctr"/>
             <a:r>
               <a:rPr lang="en-GB" sz="2400" dirty="0"/>
-              <a:t>2.8 ÷ 0.7 = 4</a:t>
+              <a:t>2,8 ÷ 0,7 = 4</a:t>
             </a:r>
           </a:p>
         </p:txBody>
@@ -4154,7 +4154,7 @@
             <a:pPr algn="ctr"/>
             <a:r>
               <a:rPr lang="en-GB" sz="2400" dirty="0"/>
-              <a:t>3.2 ÷ 0.4 = 8</a:t>
+              <a:t>3,2 ÷ 0,4 = 8</a:t>
             </a:r>
           </a:p>
         </p:txBody>
@@ -4728,7 +4728,7 @@
             <a:pPr algn="ctr"/>
             <a:r>
               <a:rPr lang="en-GB" sz="2400" dirty="0"/>
-              <a:t>1.4 ÷ 0.7 = 2</a:t>
+              <a:t>1,4 ÷ 0,7 = 2</a:t>
             </a:r>
           </a:p>
         </p:txBody>
@@ -4764,7 +4764,7 @@
             <a:pPr algn="ctr"/>
             <a:r>
               <a:rPr lang="en-GB" sz="2400" dirty="0"/>
-              <a:t>3.0 ÷ 1.5 = 2</a:t>
+              <a:t>3,0 ÷ 1,5 = 2</a:t>
             </a:r>
           </a:p>
         </p:txBody>
@@ -4800,7 +4800,7 @@
             <a:pPr algn="ctr"/>
             <a:r>
               <a:rPr lang="en-GB" sz="2400" dirty="0"/>
-              <a:t>9.0 ÷ 4.5 = 2</a:t>
+              <a:t>9,0 ÷ 4,5 = 2</a:t>
             </a:r>
           </a:p>
         </p:txBody>
@@ -4836,7 +4836,7 @@
             <a:pPr algn="ctr"/>
             <a:r>
               <a:rPr lang="en-GB" sz="2400" dirty="0"/>
-              <a:t>4.8 ÷ 1.6 = 3</a:t>
+              <a:t>4,8 ÷ 1,6 = 3</a:t>
             </a:r>
           </a:p>
         </p:txBody>
@@ -5636,7 +5636,7 @@
           <a:p>
             <a:r>
               <a:rPr lang="en-GB" sz="2400" dirty="0"/>
-              <a:t>2.7 ÷ 0.45 = 06</a:t>
+              <a:t>2,7 ÷ 0,45 = 06</a:t>
             </a:r>
           </a:p>
         </p:txBody>
@@ -5671,7 +5671,7 @@
           <a:p>
             <a:r>
               <a:rPr lang="en-GB" sz="2400" dirty="0"/>
-              <a:t>9.6 ÷ 0.12 = 80</a:t>
+              <a:t>9,6 ÷ 0,12 = 80</a:t>
             </a:r>
           </a:p>
         </p:txBody>
@@ -5706,7 +5706,7 @@
           <a:p>
             <a:r>
               <a:rPr lang="en-GB" sz="2400" dirty="0"/>
-              <a:t>3.8 ÷ 0.95 = 04</a:t>
+              <a:t>3,8 ÷ 0,95 = 04</a:t>
             </a:r>
           </a:p>
         </p:txBody>
@@ -6397,7 +6397,7 @@
           <a:p>
             <a:r>
               <a:rPr lang="en-GB" sz="2400" dirty="0"/>
-              <a:t>8.6 ÷ 0.20 = 43</a:t>
+              <a:t>8,6 ÷ 0,20 = 43</a:t>
             </a:r>
           </a:p>
         </p:txBody>
@@ -6871,7 +6871,7 @@
           <a:p>
             <a:r>
               <a:rPr lang="en-GB" sz="2400" dirty="0"/>
-              <a:t>3.6 ÷ 0.15 = 24</a:t>
+              <a:t>3,6 ÷ 0,15 = 24</a:t>
             </a:r>
           </a:p>
         </p:txBody>
@@ -35625,7 +35625,7 @@
           <a:p>
             <a:r>
               <a:rPr lang="en-GB" sz="2400" dirty="0"/>
-              <a:t>0.2 × 0.3 = 0.06</a:t>
+              <a:t>0,2 × 0,3 = 0,06</a:t>
             </a:r>
           </a:p>
         </p:txBody>
@@ -36247,7 +36247,7 @@
           <a:p>
             <a:r>
               <a:rPr lang="en-GB" sz="2400" dirty="0"/>
-              <a:t>0.9 × 0.8 = 0.72</a:t>
+              <a:t>0,9 × 0,8 = 0,72</a:t>
             </a:r>
           </a:p>
         </p:txBody>
@@ -36282,7 +36282,7 @@
           <a:p>
             <a:r>
               <a:rPr lang="en-GB" sz="2400" dirty="0"/>
-              <a:t>0.7 × 0.8 = 0.56</a:t>
+              <a:t>0,7 × 0,8 = 0,56</a:t>
             </a:r>
           </a:p>
         </p:txBody>
@@ -37154,7 +37154,7 @@
           <a:p>
             <a:r>
               <a:rPr lang="en-GB" sz="2400" dirty="0"/>
-              <a:t>6.4 × 0.8 = 5.12</a:t>
+              <a:t>6,4 × 0,8 = 5,12</a:t>
             </a:r>
           </a:p>
         </p:txBody>
@@ -37830,7 +37830,7 @@
           <a:p>
             <a:r>
               <a:rPr lang="en-GB" sz="2400" dirty="0"/>
-              <a:t>6.4 × 0.5 = 3.20</a:t>
+              <a:t>6,4 × 0,5 = 3,20</a:t>
             </a:r>
           </a:p>
         </p:txBody>
@@ -37865,7 +37865,7 @@
           <a:p>
             <a:r>
               <a:rPr lang="en-GB" sz="2400" dirty="0"/>
-              <a:t>1.2 × 0.8 = 0.96</a:t>
+              <a:t>1,2 × 0,8 = 0,96</a:t>
             </a:r>
           </a:p>
         </p:txBody>
@@ -37900,7 +37900,7 @@
           <a:p>
             <a:r>
               <a:rPr lang="en-GB" sz="2400" dirty="0"/>
-              <a:t>4.2 × 0.9 = 3.78</a:t>
+              <a:t>4,2 × 0,9 = 3,78</a:t>
             </a:r>
           </a:p>
         </p:txBody>
@@ -37935,7 +37935,7 @@
           <a:p>
             <a:r>
               <a:rPr lang="en-GB" sz="2400" dirty="0"/>
-              <a:t>3.4 × 0.2 = 0.68</a:t>
+              <a:t>3,4 × 0,2 = 0,68</a:t>
             </a:r>
           </a:p>
         </p:txBody>
@@ -37970,7 +37970,7 @@
           <a:p>
             <a:r>
               <a:rPr lang="en-GB" sz="2400" dirty="0"/>
-              <a:t>2.6 × 0.3 = 0.78</a:t>
+              <a:t>2,6 × 0,3 = 0,78</a:t>
             </a:r>
           </a:p>
         </p:txBody>
@@ -38005,7 +38005,7 @@
           <a:p>
             <a:r>
               <a:rPr lang="en-GB" sz="2400" dirty="0"/>
-              <a:t>9.6 × 0.5 = 4.80</a:t>
+              <a:t>9,6 × 0,5 = 4,80</a:t>
             </a:r>
           </a:p>
         </p:txBody>
@@ -38040,7 +38040,7 @@
           <a:p>
             <a:r>
               <a:rPr lang="en-GB" sz="2400" dirty="0"/>
-              <a:t>1.2 × 0.7 = 0.84</a:t>
+              <a:t>1,2 × 0,7 = 0,84</a:t>
             </a:r>
           </a:p>
         </p:txBody>
